--- a/docs/reports/project-status-2026-06-18.pptx
+++ b/docs/reports/project-status-2026-06-18.pptx
@@ -16071,7 +16071,7 @@
                 <a:ea typeface="Calibri" pitchFamily="34" charset="-122"/>
                 <a:cs typeface="Calibri" pitchFamily="34" charset="-120"/>
               </a:rPr>
-              <a:t>内嵌 LangChain4j 流式 fork 代码与 TODO 输出，升级或异常链路可能放大维护成本。</a:t>
+              <a:t>内嵌 LangChain4j 流式 fork 代码与 遗留调试项 输出，升级或异常链路可能放大维护成本。</a:t>
             </a:r>
             <a:endParaRPr lang="en-US" sz="1110" dirty="0"/>
           </a:p>
